--- a/courses/learn_opensta/module99-00-wrap/slides.pptx
+++ b/courses/learn_opensta/module99-00-wrap/slides.pptx
@@ -504,7 +504,7 @@
           <a:lstStyle/>
           <a:p>
             <a:r>
-              <a:t>You finished the OpenSTA map and the real CLI evidence path on tiny_combo with liberty-lite.</a:t>
+              <a:t>You finished the OpenSTA map, real CLI evidence, algorithms bound to report_checks, and C++ tree literacy.</a:t>
             </a:r>
           </a:p>
         </p:txBody>
@@ -574,7 +574,7 @@
           <a:lstStyle/>
           <a:p>
             <a:r>
-              <a:t>You can run sta scripts, link AND2/BUF/INV, declare a 10-unit clock, and read report_checks with delay 2 and slack 8.</a:t>
+              <a:t>You can match report slack 8 on path b to y, and open Network, Graph, Sdc, Search with intent to contribute.</a:t>
             </a:r>
           </a:p>
         </p:txBody>
@@ -644,7 +644,7 @@
           <a:lstStyle/>
           <a:p>
             <a:r>
-              <a:t>Algorithms bound to OpenSTA reports and internals literacy come next, then Magic/Netgen/KLayout and OpenROAD/OpenLane.</a:t>
+              <a:t>Next tools on the OpenLane path: Magic, Netgen, KLayout, then OpenROAD and OpenLane.</a:t>
             </a:r>
           </a:p>
         </p:txBody>
@@ -3687,7 +3687,7 @@
                 </a:solidFill>
                 <a:latin typeface="Calibri"/>
               </a:rPr>
-              <a:t>Parts A and B complete</a:t>
+              <a:t>Parts A–D complete</a:t>
             </a:r>
           </a:p>
           <a:p>
@@ -3706,7 +3706,7 @@
                 </a:solidFill>
                 <a:latin typeface="Calibri"/>
               </a:rPr>
-              <a:t>You finished the OpenSTA map and the real CLI evidence path on tiny_combo with liberty-lite</a:t>
+              <a:t>You finished the OpenSTA map, real CLI evidence, algorithms bound to report_checks, and C++ tree literacy</a:t>
             </a:r>
           </a:p>
         </p:txBody>
@@ -3847,7 +3847,7 @@
                 </a:solidFill>
                 <a:latin typeface="Calibri"/>
               </a:rPr>
-              <a:t>You can run sta scripts, link AND2/BUF/INV, declare a 10-unit clock</a:t>
+              <a:t>You can match report slack 8 on path b to y</a:t>
             </a:r>
           </a:p>
         </p:txBody>
@@ -4010,7 +4010,7 @@
                 </a:solidFill>
                 <a:latin typeface="Calibri"/>
               </a:rPr>
-              <a:t>Algorithms bound to OpenSTA reports and internals literacy come next</a:t>
+              <a:t>Next tools on the OpenLane path: Magic, Netgen, KLayout, then OpenROAD and OpenLane</a:t>
             </a:r>
           </a:p>
         </p:txBody>
